--- a/decks/geog-landscapes/geog-landscapes_ch4_managing-coasts.pptx
+++ b/decks/geog-landscapes/geog-landscapes_ch4_managing-coasts.pptx
@@ -126,30 +126,30 @@
   <p:extLst>
     <p:ext uri="{521415D9-36F7-43E2-AB2F-B90AF26B5E84}">
       <p14:sectionLst xmlns:p14="http://schemas.microsoft.com/office/powerpoint/2010/main">
-        <p14:section name="Opening" id="{877a0e56-0e1a-bd12-18de-e440a192ad71}">
+        <p14:section name="Opening" id="{a0a7d2fd-58cf-4634-7810-5611abee009d}">
           <p14:sldIdLst>
             <p14:sldId id="256"/>
           </p14:sldIdLst>
         </p14:section>
-        <p14:section name="Gate" id="{a57b355d-ef72-6c46-4113-56ac51286d59}">
+        <p14:section name="Gate" id="{7afd0952-aadf-585a-e9df-40b15c75c987}">
           <p14:sldIdLst>
             <p14:sldId id="257"/>
             <p14:sldId id="258"/>
           </p14:sldIdLst>
         </p14:section>
-        <p14:section name="Pre-teach" id="{b64a8bab-a3c8-9175-752d-99286522c99d}">
+        <p14:section name="Pre-teach" id="{7b492ee7-176b-a326-7eaa-d05394d7ed63}">
           <p14:sldIdLst>
             <p14:sldId id="259"/>
             <p14:sldId id="260"/>
           </p14:sldIdLst>
         </p14:section>
-        <p14:section name="Read-along" id="{36960cde-c29c-1432-f134-69b580280e7d}">
+        <p14:section name="Read-along" id="{30a758a0-128c-76a9-d065-0950f6fe3f2e}">
           <p14:sldIdLst>
             <p14:sldId id="261"/>
             <p14:sldId id="262"/>
           </p14:sldIdLst>
         </p14:section>
-        <p14:section name="Teach" id="{30883cb6-7642-e99b-dd92-74930ec978b5}">
+        <p14:section name="Teach" id="{2de8b33d-9b81-daa5-7246-23a7fec6fdaf}">
           <p14:sldIdLst>
             <p14:sldId id="263"/>
             <p14:sldId id="264"/>
@@ -158,7 +158,7 @@
             <p14:sldId id="267"/>
           </p14:sldIdLst>
         </p14:section>
-        <p14:section name="Routes" id="{05360210-be28-905a-e8b6-091ec2d8fcee}">
+        <p14:section name="Routes" id="{dc0b0f9e-1e05-4358-afda-0c5ca3bd9e8a}">
           <p14:sldIdLst>
             <p14:sldId id="268"/>
             <p14:sldId id="269"/>
@@ -166,12 +166,12 @@
             <p14:sldId id="271"/>
           </p14:sldIdLst>
         </p14:section>
-        <p14:section name="Close" id="{a753f317-93d0-e102-75c9-a7bf153d9b27}">
+        <p14:section name="Close" id="{cec5022a-e979-e1a3-e924-70c853237d4d}">
           <p14:sldIdLst>
             <p14:sldId id="272"/>
           </p14:sldIdLst>
         </p14:section>
-        <p14:section name="Answers" id="{83804190-64cf-5ac4-4c6e-a3cdd61070f4}">
+        <p14:section name="Answers" id="{6f6260c9-764c-3b59-cb6c-4610716917c4}">
           <p14:sldIdLst>
             <p14:sldId id="273"/>
             <p14:sldId id="274"/>
@@ -10008,7 +10008,7 @@
                 <a:ea typeface="Calibri" pitchFamily="34" charset="-122"/>
                 <a:cs typeface="Calibri" pitchFamily="34" charset="-120"/>
               </a:rPr>
-              <a:t>Sea wall</a:t>
+              <a:t>Gabions</a:t>
             </a:r>
             <a:endParaRPr lang="en-US" sz="2400" dirty="0"/>
           </a:p>
@@ -10082,7 +10082,7 @@
                 <a:ea typeface="Calibri" pitchFamily="34" charset="-122"/>
                 <a:cs typeface="Calibri" pitchFamily="34" charset="-120"/>
               </a:rPr>
-              <a:t>Gabions</a:t>
+              <a:t>Sea wall</a:t>
             </a:r>
             <a:endParaRPr lang="en-US" sz="2400" dirty="0"/>
           </a:p>
@@ -11665,7 +11665,7 @@
                 <a:ea typeface="Calibri" pitchFamily="34" charset="-122"/>
                 <a:cs typeface="Calibri" pitchFamily="34" charset="-120"/>
               </a:rPr>
-              <a:t>Sea wall</a:t>
+              <a:t>Gabions</a:t>
             </a:r>
             <a:endParaRPr lang="en-US" sz="2400" dirty="0"/>
           </a:p>
@@ -11739,7 +11739,7 @@
                 <a:ea typeface="Calibri" pitchFamily="34" charset="-122"/>
                 <a:cs typeface="Calibri" pitchFamily="34" charset="-120"/>
               </a:rPr>
-              <a:t>Gabions</a:t>
+              <a:t>Sea wall</a:t>
             </a:r>
             <a:endParaRPr lang="en-US" sz="2400" dirty="0"/>
           </a:p>

--- a/decks/geog-landscapes/geog-landscapes_ch4_managing-coasts.pptx
+++ b/decks/geog-landscapes/geog-landscapes_ch4_managing-coasts.pptx
@@ -126,30 +126,30 @@
   <p:extLst>
     <p:ext uri="{521415D9-36F7-43E2-AB2F-B90AF26B5E84}">
       <p14:sectionLst xmlns:p14="http://schemas.microsoft.com/office/powerpoint/2010/main">
-        <p14:section name="Opening" id="{a0a7d2fd-58cf-4634-7810-5611abee009d}">
+        <p14:section name="Opening" id="{4a3b1f4a-bd87-f94f-30eb-e7b2e51ea70b}">
           <p14:sldIdLst>
             <p14:sldId id="256"/>
           </p14:sldIdLst>
         </p14:section>
-        <p14:section name="Gate" id="{7afd0952-aadf-585a-e9df-40b15c75c987}">
+        <p14:section name="Gate" id="{a37652b8-bbff-d74c-06d1-d6be8fd673bf}">
           <p14:sldIdLst>
             <p14:sldId id="257"/>
             <p14:sldId id="258"/>
           </p14:sldIdLst>
         </p14:section>
-        <p14:section name="Pre-teach" id="{7b492ee7-176b-a326-7eaa-d05394d7ed63}">
+        <p14:section name="Pre-teach" id="{a145c547-abbc-ec13-6883-bb1626f21823}">
           <p14:sldIdLst>
             <p14:sldId id="259"/>
             <p14:sldId id="260"/>
           </p14:sldIdLst>
         </p14:section>
-        <p14:section name="Read-along" id="{30a758a0-128c-76a9-d065-0950f6fe3f2e}">
+        <p14:section name="Read-along" id="{42655d54-d195-788e-206c-5b0080870e89}">
           <p14:sldIdLst>
             <p14:sldId id="261"/>
             <p14:sldId id="262"/>
           </p14:sldIdLst>
         </p14:section>
-        <p14:section name="Teach" id="{2de8b33d-9b81-daa5-7246-23a7fec6fdaf}">
+        <p14:section name="Teach" id="{32646e1e-ae54-92ba-b70a-803d9031c748}">
           <p14:sldIdLst>
             <p14:sldId id="263"/>
             <p14:sldId id="264"/>
@@ -158,7 +158,7 @@
             <p14:sldId id="267"/>
           </p14:sldIdLst>
         </p14:section>
-        <p14:section name="Routes" id="{dc0b0f9e-1e05-4358-afda-0c5ca3bd9e8a}">
+        <p14:section name="Routes" id="{12585d25-8334-f514-7411-f9315be5bd1b}">
           <p14:sldIdLst>
             <p14:sldId id="268"/>
             <p14:sldId id="269"/>
@@ -166,12 +166,12 @@
             <p14:sldId id="271"/>
           </p14:sldIdLst>
         </p14:section>
-        <p14:section name="Close" id="{cec5022a-e979-e1a3-e924-70c853237d4d}">
+        <p14:section name="Close" id="{8ba3925d-add5-023f-fa39-2abcfdabf2be}">
           <p14:sldIdLst>
             <p14:sldId id="272"/>
           </p14:sldIdLst>
         </p14:section>
-        <p14:section name="Answers" id="{6f6260c9-764c-3b59-cb6c-4610716917c4}">
+        <p14:section name="Answers" id="{ccb8cb85-8059-c840-a50f-7fdb9f5dae62}">
           <p14:sldIdLst>
             <p14:sldId id="273"/>
             <p14:sldId id="274"/>
